--- a/ATKool_Platform_Presentation.pptx
+++ b/ATKool_Platform_Presentation.pptx
@@ -5,7 +5,7 @@
     <p:sldMasterId id="2147483648" r:id="rId1"/>
   </p:sldMasterIdLst>
   <p:notesMasterIdLst>
-    <p:notesMasterId r:id="rId7"/>
+    <p:notesMasterId r:id="rId14"/>
   </p:notesMasterIdLst>
   <p:sldIdLst>
     <p:sldId id="256" r:id="rId2"/>
@@ -13,6 +13,13 @@
     <p:sldId id="258" r:id="rId4"/>
     <p:sldId id="259" r:id="rId5"/>
     <p:sldId id="260" r:id="rId6"/>
+    <p:sldId id="261" r:id="rId7"/>
+    <p:sldId id="262" r:id="rId8"/>
+    <p:sldId id="263" r:id="rId9"/>
+    <p:sldId id="264" r:id="rId10"/>
+    <p:sldId id="265" r:id="rId11"/>
+    <p:sldId id="267" r:id="rId12"/>
+    <p:sldId id="266" r:id="rId13"/>
   </p:sldIdLst>
   <p:sldSz cx="9144000" cy="5143500" type="screen16x9"/>
   <p:notesSz cx="5143500" cy="9144000"/>
@@ -652,6 +659,222 @@
     <p:extLst>
       <p:ext uri="{BB962C8B-B14F-4D97-AF65-F5344CB8AC3E}">
         <p14:creationId xmlns:p14="http://schemas.microsoft.com/office/powerpoint/2010/main" val="1024086991"/>
+      </p:ext>
+    </p:extLst>
+  </p:cSld>
+  <p:clrMapOvr>
+    <a:masterClrMapping/>
+  </p:clrMapOvr>
+</p:notes>
+</file>
+
+<file path=ppt/notesSlides/notesSlide6.xml><?xml version="1.0" encoding="utf-8"?>
+<p:notes xmlns:a="http://schemas.openxmlformats.org/drawingml/2006/main" xmlns:r="http://schemas.openxmlformats.org/officeDocument/2006/relationships" xmlns:p="http://schemas.openxmlformats.org/presentationml/2006/main">
+  <p:cSld>
+    <p:spTree>
+      <p:nvGrpSpPr>
+        <p:cNvPr id="1" name="">
+          <a:extLst>
+            <a:ext uri="{FF2B5EF4-FFF2-40B4-BE49-F238E27FC236}">
+              <a16:creationId xmlns:a16="http://schemas.microsoft.com/office/drawing/2014/main" id="{9ECCCDDE-0365-90B1-3FC8-F90EBFFDAF2C}"/>
+            </a:ext>
+          </a:extLst>
+        </p:cNvPr>
+        <p:cNvGrpSpPr/>
+        <p:nvPr/>
+      </p:nvGrpSpPr>
+      <p:grpSpPr>
+        <a:xfrm>
+          <a:off x="0" y="0"/>
+          <a:ext cx="0" cy="0"/>
+          <a:chOff x="0" y="0"/>
+          <a:chExt cx="0" cy="0"/>
+        </a:xfrm>
+      </p:grpSpPr>
+      <p:sp>
+        <p:nvSpPr>
+          <p:cNvPr id="2" name="Slide Image Placeholder 1">
+            <a:extLst>
+              <a:ext uri="{FF2B5EF4-FFF2-40B4-BE49-F238E27FC236}">
+                <a16:creationId xmlns:a16="http://schemas.microsoft.com/office/drawing/2014/main" id="{056726B5-22F7-9F77-D6E3-EA831196F6EC}"/>
+              </a:ext>
+            </a:extLst>
+          </p:cNvPr>
+          <p:cNvSpPr>
+            <a:spLocks noGrp="1" noRot="1" noChangeAspect="1"/>
+          </p:cNvSpPr>
+          <p:nvPr>
+            <p:ph type="sldImg"/>
+          </p:nvPr>
+        </p:nvSpPr>
+        <p:spPr/>
+      </p:sp>
+      <p:sp>
+        <p:nvSpPr>
+          <p:cNvPr id="3" name="Notes Placeholder 2">
+            <a:extLst>
+              <a:ext uri="{FF2B5EF4-FFF2-40B4-BE49-F238E27FC236}">
+                <a16:creationId xmlns:a16="http://schemas.microsoft.com/office/drawing/2014/main" id="{325DFA48-1A3B-D835-7432-42E8863E0B67}"/>
+              </a:ext>
+            </a:extLst>
+          </p:cNvPr>
+          <p:cNvSpPr>
+            <a:spLocks noGrp="1"/>
+          </p:cNvSpPr>
+          <p:nvPr>
+            <p:ph type="body" idx="1"/>
+          </p:nvPr>
+        </p:nvSpPr>
+        <p:spPr/>
+        <p:txBody>
+          <a:bodyPr/>
+          <a:lstStyle/>
+          <a:p>
+            <a:endParaRPr lang="en-US" dirty="0"/>
+          </a:p>
+        </p:txBody>
+      </p:sp>
+      <p:sp>
+        <p:nvSpPr>
+          <p:cNvPr id="4" name="Slide Number Placeholder 3">
+            <a:extLst>
+              <a:ext uri="{FF2B5EF4-FFF2-40B4-BE49-F238E27FC236}">
+                <a16:creationId xmlns:a16="http://schemas.microsoft.com/office/drawing/2014/main" id="{D9D4127C-FDE6-8CEB-771E-73BC52E7F4BE}"/>
+              </a:ext>
+            </a:extLst>
+          </p:cNvPr>
+          <p:cNvSpPr>
+            <a:spLocks noGrp="1"/>
+          </p:cNvSpPr>
+          <p:nvPr>
+            <p:ph type="sldNum" sz="quarter" idx="10"/>
+          </p:nvPr>
+        </p:nvSpPr>
+        <p:spPr/>
+        <p:txBody>
+          <a:bodyPr/>
+          <a:lstStyle/>
+          <a:p>
+            <a:fld id="{F7021451-1387-4CA6-816F-3879F97B5CBC}" type="slidenum">
+              <a:rPr lang="en-US"/>
+              <a:t>6</a:t>
+            </a:fld>
+            <a:endParaRPr lang="en-US"/>
+          </a:p>
+        </p:txBody>
+      </p:sp>
+    </p:spTree>
+    <p:extLst>
+      <p:ext uri="{BB962C8B-B14F-4D97-AF65-F5344CB8AC3E}">
+        <p14:creationId xmlns:p14="http://schemas.microsoft.com/office/powerpoint/2010/main" val="1721444749"/>
+      </p:ext>
+    </p:extLst>
+  </p:cSld>
+  <p:clrMapOvr>
+    <a:masterClrMapping/>
+  </p:clrMapOvr>
+</p:notes>
+</file>
+
+<file path=ppt/notesSlides/notesSlide7.xml><?xml version="1.0" encoding="utf-8"?>
+<p:notes xmlns:a="http://schemas.openxmlformats.org/drawingml/2006/main" xmlns:r="http://schemas.openxmlformats.org/officeDocument/2006/relationships" xmlns:p="http://schemas.openxmlformats.org/presentationml/2006/main">
+  <p:cSld>
+    <p:spTree>
+      <p:nvGrpSpPr>
+        <p:cNvPr id="1" name="">
+          <a:extLst>
+            <a:ext uri="{FF2B5EF4-FFF2-40B4-BE49-F238E27FC236}">
+              <a16:creationId xmlns:a16="http://schemas.microsoft.com/office/drawing/2014/main" id="{E63B097F-0C83-74F2-9C98-4E71697CA8B9}"/>
+            </a:ext>
+          </a:extLst>
+        </p:cNvPr>
+        <p:cNvGrpSpPr/>
+        <p:nvPr/>
+      </p:nvGrpSpPr>
+      <p:grpSpPr>
+        <a:xfrm>
+          <a:off x="0" y="0"/>
+          <a:ext cx="0" cy="0"/>
+          <a:chOff x="0" y="0"/>
+          <a:chExt cx="0" cy="0"/>
+        </a:xfrm>
+      </p:grpSpPr>
+      <p:sp>
+        <p:nvSpPr>
+          <p:cNvPr id="2" name="Slide Image Placeholder 1">
+            <a:extLst>
+              <a:ext uri="{FF2B5EF4-FFF2-40B4-BE49-F238E27FC236}">
+                <a16:creationId xmlns:a16="http://schemas.microsoft.com/office/drawing/2014/main" id="{6E1B281A-F0B9-00EF-6B24-31FEF846FAAD}"/>
+              </a:ext>
+            </a:extLst>
+          </p:cNvPr>
+          <p:cNvSpPr>
+            <a:spLocks noGrp="1" noRot="1" noChangeAspect="1"/>
+          </p:cNvSpPr>
+          <p:nvPr>
+            <p:ph type="sldImg"/>
+          </p:nvPr>
+        </p:nvSpPr>
+        <p:spPr/>
+      </p:sp>
+      <p:sp>
+        <p:nvSpPr>
+          <p:cNvPr id="3" name="Notes Placeholder 2">
+            <a:extLst>
+              <a:ext uri="{FF2B5EF4-FFF2-40B4-BE49-F238E27FC236}">
+                <a16:creationId xmlns:a16="http://schemas.microsoft.com/office/drawing/2014/main" id="{CF676B03-36D7-467C-AA65-48265323029D}"/>
+              </a:ext>
+            </a:extLst>
+          </p:cNvPr>
+          <p:cNvSpPr>
+            <a:spLocks noGrp="1"/>
+          </p:cNvSpPr>
+          <p:nvPr>
+            <p:ph type="body" idx="1"/>
+          </p:nvPr>
+        </p:nvSpPr>
+        <p:spPr/>
+        <p:txBody>
+          <a:bodyPr/>
+          <a:lstStyle/>
+          <a:p>
+            <a:endParaRPr lang="en-US" dirty="0"/>
+          </a:p>
+        </p:txBody>
+      </p:sp>
+      <p:sp>
+        <p:nvSpPr>
+          <p:cNvPr id="4" name="Slide Number Placeholder 3">
+            <a:extLst>
+              <a:ext uri="{FF2B5EF4-FFF2-40B4-BE49-F238E27FC236}">
+                <a16:creationId xmlns:a16="http://schemas.microsoft.com/office/drawing/2014/main" id="{8403C695-C1F7-FF3F-4F82-61BA9C593F24}"/>
+              </a:ext>
+            </a:extLst>
+          </p:cNvPr>
+          <p:cNvSpPr>
+            <a:spLocks noGrp="1"/>
+          </p:cNvSpPr>
+          <p:nvPr>
+            <p:ph type="sldNum" sz="quarter" idx="10"/>
+          </p:nvPr>
+        </p:nvSpPr>
+        <p:spPr/>
+        <p:txBody>
+          <a:bodyPr/>
+          <a:lstStyle/>
+          <a:p>
+            <a:fld id="{F7021451-1387-4CA6-816F-3879F97B5CBC}" type="slidenum">
+              <a:rPr lang="en-US"/>
+              <a:t>7</a:t>
+            </a:fld>
+            <a:endParaRPr lang="en-US"/>
+          </a:p>
+        </p:txBody>
+      </p:sp>
+    </p:spTree>
+    <p:extLst>
+      <p:ext uri="{BB962C8B-B14F-4D97-AF65-F5344CB8AC3E}">
+        <p14:creationId xmlns:p14="http://schemas.microsoft.com/office/powerpoint/2010/main" val="1421891429"/>
       </p:ext>
     </p:extLst>
   </p:cSld>
@@ -1260,6 +1483,375 @@
 </p:sld>
 </file>
 
+<file path=ppt/slides/slide10.xml><?xml version="1.0" encoding="utf-8"?>
+<p:sld xmlns:a="http://schemas.openxmlformats.org/drawingml/2006/main" xmlns:r="http://schemas.openxmlformats.org/officeDocument/2006/relationships" xmlns:p="http://schemas.openxmlformats.org/presentationml/2006/main">
+  <p:cSld>
+    <p:spTree>
+      <p:nvGrpSpPr>
+        <p:cNvPr id="1" name="">
+          <a:extLst>
+            <a:ext uri="{FF2B5EF4-FFF2-40B4-BE49-F238E27FC236}">
+              <a16:creationId xmlns:a16="http://schemas.microsoft.com/office/drawing/2014/main" id="{2E385F48-5E34-0198-A17A-E2DAD85C5EF9}"/>
+            </a:ext>
+          </a:extLst>
+        </p:cNvPr>
+        <p:cNvGrpSpPr/>
+        <p:nvPr/>
+      </p:nvGrpSpPr>
+      <p:grpSpPr>
+        <a:xfrm>
+          <a:off x="0" y="0"/>
+          <a:ext cx="0" cy="0"/>
+          <a:chOff x="0" y="0"/>
+          <a:chExt cx="0" cy="0"/>
+        </a:xfrm>
+      </p:grpSpPr>
+      <p:sp>
+        <p:nvSpPr>
+          <p:cNvPr id="4" name="TextBox 3">
+            <a:extLst>
+              <a:ext uri="{FF2B5EF4-FFF2-40B4-BE49-F238E27FC236}">
+                <a16:creationId xmlns:a16="http://schemas.microsoft.com/office/drawing/2014/main" id="{65C892AA-E492-4BF8-1101-243C9A9E4CAF}"/>
+              </a:ext>
+            </a:extLst>
+          </p:cNvPr>
+          <p:cNvSpPr txBox="1"/>
+          <p:nvPr/>
+        </p:nvSpPr>
+        <p:spPr>
+          <a:xfrm>
+            <a:off x="-1087821" y="724479"/>
+            <a:ext cx="4572000" cy="369332"/>
+          </a:xfrm>
+          <a:prstGeom prst="rect">
+            <a:avLst/>
+          </a:prstGeom>
+          <a:noFill/>
+        </p:spPr>
+        <p:txBody>
+          <a:bodyPr wrap="square">
+            <a:spAutoFit/>
+          </a:bodyPr>
+          <a:lstStyle/>
+          <a:p>
+            <a:pPr algn="ctr">
+              <a:spcAft>
+                <a:spcPts val="600"/>
+              </a:spcAft>
+              <a:buNone/>
+            </a:pPr>
+            <a:r>
+              <a:rPr lang="en-IN" b="1" i="0" dirty="0">
+                <a:solidFill>
+                  <a:srgbClr val="0F172A"/>
+                </a:solidFill>
+                <a:effectLst/>
+                <a:latin typeface="Inter"/>
+              </a:rPr>
+              <a:t>Parent Portal</a:t>
+            </a:r>
+          </a:p>
+        </p:txBody>
+      </p:sp>
+      <p:pic>
+        <p:nvPicPr>
+          <p:cNvPr id="6" name="Picture 5">
+            <a:extLst>
+              <a:ext uri="{FF2B5EF4-FFF2-40B4-BE49-F238E27FC236}">
+                <a16:creationId xmlns:a16="http://schemas.microsoft.com/office/drawing/2014/main" id="{B22062F8-C0DA-4A31-14F7-8AED73994C2C}"/>
+              </a:ext>
+            </a:extLst>
+          </p:cNvPr>
+          <p:cNvPicPr>
+            <a:picLocks noChangeAspect="1"/>
+          </p:cNvPicPr>
+          <p:nvPr/>
+        </p:nvPicPr>
+        <p:blipFill>
+          <a:blip r:embed="rId2"/>
+          <a:stretch>
+            <a:fillRect/>
+          </a:stretch>
+        </p:blipFill>
+        <p:spPr>
+          <a:xfrm>
+            <a:off x="2228193" y="827875"/>
+            <a:ext cx="3807348" cy="3926742"/>
+          </a:xfrm>
+          <a:prstGeom prst="rect">
+            <a:avLst/>
+          </a:prstGeom>
+        </p:spPr>
+      </p:pic>
+    </p:spTree>
+    <p:extLst>
+      <p:ext uri="{BB962C8B-B14F-4D97-AF65-F5344CB8AC3E}">
+        <p14:creationId xmlns:p14="http://schemas.microsoft.com/office/powerpoint/2010/main" val="2002696930"/>
+      </p:ext>
+    </p:extLst>
+  </p:cSld>
+  <p:clrMapOvr>
+    <a:masterClrMapping/>
+  </p:clrMapOvr>
+</p:sld>
+</file>
+
+<file path=ppt/slides/slide11.xml><?xml version="1.0" encoding="utf-8"?>
+<p:sld xmlns:a="http://schemas.openxmlformats.org/drawingml/2006/main" xmlns:r="http://schemas.openxmlformats.org/officeDocument/2006/relationships" xmlns:p="http://schemas.openxmlformats.org/presentationml/2006/main">
+  <p:cSld>
+    <p:spTree>
+      <p:nvGrpSpPr>
+        <p:cNvPr id="1" name="">
+          <a:extLst>
+            <a:ext uri="{FF2B5EF4-FFF2-40B4-BE49-F238E27FC236}">
+              <a16:creationId xmlns:a16="http://schemas.microsoft.com/office/drawing/2014/main" id="{4BB6BBEF-72C8-EB2F-C798-8BEC6920E7BB}"/>
+            </a:ext>
+          </a:extLst>
+        </p:cNvPr>
+        <p:cNvGrpSpPr/>
+        <p:nvPr/>
+      </p:nvGrpSpPr>
+      <p:grpSpPr>
+        <a:xfrm>
+          <a:off x="0" y="0"/>
+          <a:ext cx="0" cy="0"/>
+          <a:chOff x="0" y="0"/>
+          <a:chExt cx="0" cy="0"/>
+        </a:xfrm>
+      </p:grpSpPr>
+      <p:sp>
+        <p:nvSpPr>
+          <p:cNvPr id="4" name="TextBox 3">
+            <a:extLst>
+              <a:ext uri="{FF2B5EF4-FFF2-40B4-BE49-F238E27FC236}">
+                <a16:creationId xmlns:a16="http://schemas.microsoft.com/office/drawing/2014/main" id="{A927C4B0-77D1-331E-3572-91E3BC35F464}"/>
+              </a:ext>
+            </a:extLst>
+          </p:cNvPr>
+          <p:cNvSpPr txBox="1"/>
+          <p:nvPr/>
+        </p:nvSpPr>
+        <p:spPr>
+          <a:xfrm>
+            <a:off x="-1087821" y="724479"/>
+            <a:ext cx="4572000" cy="369332"/>
+          </a:xfrm>
+          <a:prstGeom prst="rect">
+            <a:avLst/>
+          </a:prstGeom>
+          <a:noFill/>
+        </p:spPr>
+        <p:txBody>
+          <a:bodyPr wrap="square">
+            <a:spAutoFit/>
+          </a:bodyPr>
+          <a:lstStyle/>
+          <a:p>
+            <a:pPr algn="ctr">
+              <a:spcAft>
+                <a:spcPts val="600"/>
+              </a:spcAft>
+              <a:buNone/>
+            </a:pPr>
+            <a:r>
+              <a:rPr lang="en-IN" b="1" i="0" dirty="0">
+                <a:solidFill>
+                  <a:srgbClr val="0F172A"/>
+                </a:solidFill>
+                <a:effectLst/>
+                <a:latin typeface="Inter"/>
+              </a:rPr>
+              <a:t>Parent Portal</a:t>
+            </a:r>
+          </a:p>
+        </p:txBody>
+      </p:sp>
+      <p:pic>
+        <p:nvPicPr>
+          <p:cNvPr id="3" name="Picture 2">
+            <a:extLst>
+              <a:ext uri="{FF2B5EF4-FFF2-40B4-BE49-F238E27FC236}">
+                <a16:creationId xmlns:a16="http://schemas.microsoft.com/office/drawing/2014/main" id="{6C3E17AE-08FB-4F66-EA44-0C091FC667B2}"/>
+              </a:ext>
+            </a:extLst>
+          </p:cNvPr>
+          <p:cNvPicPr>
+            <a:picLocks noChangeAspect="1"/>
+          </p:cNvPicPr>
+          <p:nvPr/>
+        </p:nvPicPr>
+        <p:blipFill>
+          <a:blip r:embed="rId2"/>
+          <a:stretch>
+            <a:fillRect/>
+          </a:stretch>
+        </p:blipFill>
+        <p:spPr>
+          <a:xfrm>
+            <a:off x="0" y="1491446"/>
+            <a:ext cx="9144000" cy="2160607"/>
+          </a:xfrm>
+          <a:prstGeom prst="rect">
+            <a:avLst/>
+          </a:prstGeom>
+        </p:spPr>
+      </p:pic>
+    </p:spTree>
+    <p:extLst>
+      <p:ext uri="{BB962C8B-B14F-4D97-AF65-F5344CB8AC3E}">
+        <p14:creationId xmlns:p14="http://schemas.microsoft.com/office/powerpoint/2010/main" val="3621868475"/>
+      </p:ext>
+    </p:extLst>
+  </p:cSld>
+  <p:clrMapOvr>
+    <a:masterClrMapping/>
+  </p:clrMapOvr>
+</p:sld>
+</file>
+
+<file path=ppt/slides/slide12.xml><?xml version="1.0" encoding="utf-8"?>
+<p:sld xmlns:a="http://schemas.openxmlformats.org/drawingml/2006/main" xmlns:r="http://schemas.openxmlformats.org/officeDocument/2006/relationships" xmlns:p="http://schemas.openxmlformats.org/presentationml/2006/main">
+  <p:cSld>
+    <p:spTree>
+      <p:nvGrpSpPr>
+        <p:cNvPr id="1" name="">
+          <a:extLst>
+            <a:ext uri="{FF2B5EF4-FFF2-40B4-BE49-F238E27FC236}">
+              <a16:creationId xmlns:a16="http://schemas.microsoft.com/office/drawing/2014/main" id="{4EB71202-0F98-D1E4-E111-65A5E5A0A103}"/>
+            </a:ext>
+          </a:extLst>
+        </p:cNvPr>
+        <p:cNvGrpSpPr/>
+        <p:nvPr/>
+      </p:nvGrpSpPr>
+      <p:grpSpPr>
+        <a:xfrm>
+          <a:off x="0" y="0"/>
+          <a:ext cx="0" cy="0"/>
+          <a:chOff x="0" y="0"/>
+          <a:chExt cx="0" cy="0"/>
+        </a:xfrm>
+      </p:grpSpPr>
+      <p:sp>
+        <p:nvSpPr>
+          <p:cNvPr id="4" name="TextBox 3">
+            <a:extLst>
+              <a:ext uri="{FF2B5EF4-FFF2-40B4-BE49-F238E27FC236}">
+                <a16:creationId xmlns:a16="http://schemas.microsoft.com/office/drawing/2014/main" id="{F2EDB65D-0A9A-50D5-C0ED-0CE3B9C8E1AF}"/>
+              </a:ext>
+            </a:extLst>
+          </p:cNvPr>
+          <p:cNvSpPr txBox="1"/>
+          <p:nvPr/>
+        </p:nvSpPr>
+        <p:spPr>
+          <a:xfrm>
+            <a:off x="-1087821" y="724479"/>
+            <a:ext cx="4572000" cy="369332"/>
+          </a:xfrm>
+          <a:prstGeom prst="rect">
+            <a:avLst/>
+          </a:prstGeom>
+          <a:noFill/>
+        </p:spPr>
+        <p:txBody>
+          <a:bodyPr wrap="square">
+            <a:spAutoFit/>
+          </a:bodyPr>
+          <a:lstStyle/>
+          <a:p>
+            <a:pPr algn="ctr">
+              <a:spcAft>
+                <a:spcPts val="600"/>
+              </a:spcAft>
+              <a:buNone/>
+            </a:pPr>
+            <a:r>
+              <a:rPr lang="en-IN" b="1" i="0" dirty="0">
+                <a:solidFill>
+                  <a:srgbClr val="0F172A"/>
+                </a:solidFill>
+                <a:effectLst/>
+                <a:latin typeface="Inter"/>
+              </a:rPr>
+              <a:t>Parent Portal</a:t>
+            </a:r>
+          </a:p>
+        </p:txBody>
+      </p:sp>
+      <p:pic>
+        <p:nvPicPr>
+          <p:cNvPr id="6" name="Picture 5">
+            <a:extLst>
+              <a:ext uri="{FF2B5EF4-FFF2-40B4-BE49-F238E27FC236}">
+                <a16:creationId xmlns:a16="http://schemas.microsoft.com/office/drawing/2014/main" id="{D5E7B5B6-9370-B940-FD34-C62958A5AAF0}"/>
+              </a:ext>
+            </a:extLst>
+          </p:cNvPr>
+          <p:cNvPicPr>
+            <a:picLocks noChangeAspect="1"/>
+          </p:cNvPicPr>
+          <p:nvPr/>
+        </p:nvPicPr>
+        <p:blipFill>
+          <a:blip r:embed="rId2"/>
+          <a:stretch>
+            <a:fillRect/>
+          </a:stretch>
+        </p:blipFill>
+        <p:spPr>
+          <a:xfrm>
+            <a:off x="2228193" y="827875"/>
+            <a:ext cx="3807348" cy="3926742"/>
+          </a:xfrm>
+          <a:prstGeom prst="rect">
+            <a:avLst/>
+          </a:prstGeom>
+        </p:spPr>
+      </p:pic>
+      <p:pic>
+        <p:nvPicPr>
+          <p:cNvPr id="3" name="Picture 2">
+            <a:extLst>
+              <a:ext uri="{FF2B5EF4-FFF2-40B4-BE49-F238E27FC236}">
+                <a16:creationId xmlns:a16="http://schemas.microsoft.com/office/drawing/2014/main" id="{13FEC397-A9B6-C1D7-0437-2E0357119CA9}"/>
+              </a:ext>
+            </a:extLst>
+          </p:cNvPr>
+          <p:cNvPicPr>
+            <a:picLocks noChangeAspect="1"/>
+          </p:cNvPicPr>
+          <p:nvPr/>
+        </p:nvPicPr>
+        <p:blipFill>
+          <a:blip r:embed="rId3"/>
+          <a:stretch>
+            <a:fillRect/>
+          </a:stretch>
+        </p:blipFill>
+        <p:spPr>
+          <a:xfrm>
+            <a:off x="0" y="169933"/>
+            <a:ext cx="9144000" cy="4803633"/>
+          </a:xfrm>
+          <a:prstGeom prst="rect">
+            <a:avLst/>
+          </a:prstGeom>
+        </p:spPr>
+      </p:pic>
+    </p:spTree>
+    <p:extLst>
+      <p:ext uri="{BB962C8B-B14F-4D97-AF65-F5344CB8AC3E}">
+        <p14:creationId xmlns:p14="http://schemas.microsoft.com/office/powerpoint/2010/main" val="1290383708"/>
+      </p:ext>
+    </p:extLst>
+  </p:cSld>
+  <p:clrMapOvr>
+    <a:masterClrMapping/>
+  </p:clrMapOvr>
+</p:sld>
+</file>
+
 <file path=ppt/slides/slide2.xml><?xml version="1.0" encoding="utf-8"?>
 <p:sld xmlns:a="http://schemas.openxmlformats.org/drawingml/2006/main" xmlns:r="http://schemas.openxmlformats.org/officeDocument/2006/relationships" xmlns:p="http://schemas.openxmlformats.org/presentationml/2006/main">
   <p:cSld name="Slide 2">
@@ -1778,6 +2370,400 @@
         </p:spPr>
       </p:pic>
     </p:spTree>
+  </p:cSld>
+  <p:clrMapOvr>
+    <a:masterClrMapping/>
+  </p:clrMapOvr>
+</p:sld>
+</file>
+
+<file path=ppt/slides/slide6.xml><?xml version="1.0" encoding="utf-8"?>
+<p:sld xmlns:a="http://schemas.openxmlformats.org/drawingml/2006/main" xmlns:r="http://schemas.openxmlformats.org/officeDocument/2006/relationships" xmlns:p="http://schemas.openxmlformats.org/presentationml/2006/main">
+  <p:cSld>
+    <p:spTree>
+      <p:nvGrpSpPr>
+        <p:cNvPr id="1" name="">
+          <a:extLst>
+            <a:ext uri="{FF2B5EF4-FFF2-40B4-BE49-F238E27FC236}">
+              <a16:creationId xmlns:a16="http://schemas.microsoft.com/office/drawing/2014/main" id="{F285BA82-9DA3-24DE-57B9-7D2AC16DE741}"/>
+            </a:ext>
+          </a:extLst>
+        </p:cNvPr>
+        <p:cNvGrpSpPr/>
+        <p:nvPr/>
+      </p:nvGrpSpPr>
+      <p:grpSpPr>
+        <a:xfrm>
+          <a:off x="0" y="0"/>
+          <a:ext cx="0" cy="0"/>
+          <a:chOff x="0" y="0"/>
+          <a:chExt cx="0" cy="0"/>
+        </a:xfrm>
+      </p:grpSpPr>
+      <p:sp>
+        <p:nvSpPr>
+          <p:cNvPr id="2" name="Text 0">
+            <a:extLst>
+              <a:ext uri="{FF2B5EF4-FFF2-40B4-BE49-F238E27FC236}">
+                <a16:creationId xmlns:a16="http://schemas.microsoft.com/office/drawing/2014/main" id="{AAC7E74E-2D55-C219-E721-E7F9C3D7C87A}"/>
+              </a:ext>
+            </a:extLst>
+          </p:cNvPr>
+          <p:cNvSpPr/>
+          <p:nvPr/>
+        </p:nvSpPr>
+        <p:spPr>
+          <a:xfrm>
+            <a:off x="457200" y="731520"/>
+            <a:ext cx="8229600" cy="457200"/>
+          </a:xfrm>
+          <a:prstGeom prst="rect">
+            <a:avLst/>
+          </a:prstGeom>
+          <a:noFill/>
+          <a:ln/>
+        </p:spPr>
+        <p:txBody>
+          <a:bodyPr wrap="square" rtlCol="0" anchor="ctr"/>
+          <a:lstStyle/>
+          <a:p>
+            <a:r>
+              <a:rPr lang="en-IN" b="1" dirty="0"/>
+              <a:t>Teacher Portal</a:t>
+            </a:r>
+          </a:p>
+        </p:txBody>
+      </p:sp>
+      <p:sp>
+        <p:nvSpPr>
+          <p:cNvPr id="3" name="Text 1">
+            <a:extLst>
+              <a:ext uri="{FF2B5EF4-FFF2-40B4-BE49-F238E27FC236}">
+                <a16:creationId xmlns:a16="http://schemas.microsoft.com/office/drawing/2014/main" id="{C4E9B19F-20E7-12F1-27C7-ACFF14045F9F}"/>
+              </a:ext>
+            </a:extLst>
+          </p:cNvPr>
+          <p:cNvSpPr/>
+          <p:nvPr/>
+        </p:nvSpPr>
+        <p:spPr>
+          <a:xfrm>
+            <a:off x="457200" y="1371600"/>
+            <a:ext cx="1981200" cy="2743200"/>
+          </a:xfrm>
+          <a:prstGeom prst="rect">
+            <a:avLst/>
+          </a:prstGeom>
+          <a:noFill/>
+          <a:ln/>
+        </p:spPr>
+        <p:txBody>
+          <a:bodyPr wrap="square" rtlCol="0" anchor="t"/>
+          <a:lstStyle/>
+          <a:p>
+            <a:pPr marL="0" indent="0">
+              <a:buNone/>
+            </a:pPr>
+            <a:endParaRPr lang="en-US" sz="1800" dirty="0"/>
+          </a:p>
+        </p:txBody>
+      </p:sp>
+      <p:pic>
+        <p:nvPicPr>
+          <p:cNvPr id="5" name="Picture 4">
+            <a:extLst>
+              <a:ext uri="{FF2B5EF4-FFF2-40B4-BE49-F238E27FC236}">
+                <a16:creationId xmlns:a16="http://schemas.microsoft.com/office/drawing/2014/main" id="{2D5A9080-3325-FD77-FFDC-552AF16301BE}"/>
+              </a:ext>
+            </a:extLst>
+          </p:cNvPr>
+          <p:cNvPicPr>
+            <a:picLocks noChangeAspect="1"/>
+          </p:cNvPicPr>
+          <p:nvPr/>
+        </p:nvPicPr>
+        <p:blipFill>
+          <a:blip r:embed="rId3"/>
+          <a:stretch>
+            <a:fillRect/>
+          </a:stretch>
+        </p:blipFill>
+        <p:spPr>
+          <a:xfrm>
+            <a:off x="2045981" y="1028700"/>
+            <a:ext cx="4617580" cy="3535417"/>
+          </a:xfrm>
+          <a:prstGeom prst="rect">
+            <a:avLst/>
+          </a:prstGeom>
+        </p:spPr>
+      </p:pic>
+    </p:spTree>
+    <p:extLst>
+      <p:ext uri="{BB962C8B-B14F-4D97-AF65-F5344CB8AC3E}">
+        <p14:creationId xmlns:p14="http://schemas.microsoft.com/office/powerpoint/2010/main" val="3908697854"/>
+      </p:ext>
+    </p:extLst>
+  </p:cSld>
+  <p:clrMapOvr>
+    <a:masterClrMapping/>
+  </p:clrMapOvr>
+</p:sld>
+</file>
+
+<file path=ppt/slides/slide7.xml><?xml version="1.0" encoding="utf-8"?>
+<p:sld xmlns:a="http://schemas.openxmlformats.org/drawingml/2006/main" xmlns:r="http://schemas.openxmlformats.org/officeDocument/2006/relationships" xmlns:p="http://schemas.openxmlformats.org/presentationml/2006/main">
+  <p:cSld>
+    <p:spTree>
+      <p:nvGrpSpPr>
+        <p:cNvPr id="1" name="">
+          <a:extLst>
+            <a:ext uri="{FF2B5EF4-FFF2-40B4-BE49-F238E27FC236}">
+              <a16:creationId xmlns:a16="http://schemas.microsoft.com/office/drawing/2014/main" id="{F75F1351-6AEF-59B0-14FF-FD5273E9EE34}"/>
+            </a:ext>
+          </a:extLst>
+        </p:cNvPr>
+        <p:cNvGrpSpPr/>
+        <p:nvPr/>
+      </p:nvGrpSpPr>
+      <p:grpSpPr>
+        <a:xfrm>
+          <a:off x="0" y="0"/>
+          <a:ext cx="0" cy="0"/>
+          <a:chOff x="0" y="0"/>
+          <a:chExt cx="0" cy="0"/>
+        </a:xfrm>
+      </p:grpSpPr>
+      <p:sp>
+        <p:nvSpPr>
+          <p:cNvPr id="2" name="Text 0">
+            <a:extLst>
+              <a:ext uri="{FF2B5EF4-FFF2-40B4-BE49-F238E27FC236}">
+                <a16:creationId xmlns:a16="http://schemas.microsoft.com/office/drawing/2014/main" id="{A71E2010-209A-E6F7-042D-5F82A5284336}"/>
+              </a:ext>
+            </a:extLst>
+          </p:cNvPr>
+          <p:cNvSpPr/>
+          <p:nvPr/>
+        </p:nvSpPr>
+        <p:spPr>
+          <a:xfrm>
+            <a:off x="457200" y="731520"/>
+            <a:ext cx="8229600" cy="457200"/>
+          </a:xfrm>
+          <a:prstGeom prst="rect">
+            <a:avLst/>
+          </a:prstGeom>
+          <a:noFill/>
+          <a:ln/>
+        </p:spPr>
+        <p:txBody>
+          <a:bodyPr wrap="square" rtlCol="0" anchor="ctr"/>
+          <a:lstStyle/>
+          <a:p>
+            <a:r>
+              <a:rPr lang="en-IN" b="1" dirty="0"/>
+              <a:t>Teacher Portal</a:t>
+            </a:r>
+          </a:p>
+        </p:txBody>
+      </p:sp>
+      <p:sp>
+        <p:nvSpPr>
+          <p:cNvPr id="3" name="Text 1">
+            <a:extLst>
+              <a:ext uri="{FF2B5EF4-FFF2-40B4-BE49-F238E27FC236}">
+                <a16:creationId xmlns:a16="http://schemas.microsoft.com/office/drawing/2014/main" id="{D7DB4B78-03E5-EDEB-9C03-EA051EDCDC56}"/>
+              </a:ext>
+            </a:extLst>
+          </p:cNvPr>
+          <p:cNvSpPr/>
+          <p:nvPr/>
+        </p:nvSpPr>
+        <p:spPr>
+          <a:xfrm>
+            <a:off x="457200" y="1371600"/>
+            <a:ext cx="1981200" cy="2743200"/>
+          </a:xfrm>
+          <a:prstGeom prst="rect">
+            <a:avLst/>
+          </a:prstGeom>
+          <a:noFill/>
+          <a:ln/>
+        </p:spPr>
+        <p:txBody>
+          <a:bodyPr wrap="square" rtlCol="0" anchor="t"/>
+          <a:lstStyle/>
+          <a:p>
+            <a:pPr marL="0" indent="0">
+              <a:buNone/>
+            </a:pPr>
+            <a:endParaRPr lang="en-US" sz="1800" dirty="0"/>
+          </a:p>
+        </p:txBody>
+      </p:sp>
+      <p:pic>
+        <p:nvPicPr>
+          <p:cNvPr id="6" name="Picture 5">
+            <a:extLst>
+              <a:ext uri="{FF2B5EF4-FFF2-40B4-BE49-F238E27FC236}">
+                <a16:creationId xmlns:a16="http://schemas.microsoft.com/office/drawing/2014/main" id="{849BFA13-6E62-61E4-708B-3AFFE0A12E7B}"/>
+              </a:ext>
+            </a:extLst>
+          </p:cNvPr>
+          <p:cNvPicPr>
+            <a:picLocks noChangeAspect="1"/>
+          </p:cNvPicPr>
+          <p:nvPr/>
+        </p:nvPicPr>
+        <p:blipFill>
+          <a:blip r:embed="rId3"/>
+          <a:stretch>
+            <a:fillRect/>
+          </a:stretch>
+        </p:blipFill>
+        <p:spPr>
+          <a:xfrm>
+            <a:off x="0" y="0"/>
+            <a:ext cx="9144000" cy="4798283"/>
+          </a:xfrm>
+          <a:prstGeom prst="rect">
+            <a:avLst/>
+          </a:prstGeom>
+        </p:spPr>
+      </p:pic>
+    </p:spTree>
+    <p:extLst>
+      <p:ext uri="{BB962C8B-B14F-4D97-AF65-F5344CB8AC3E}">
+        <p14:creationId xmlns:p14="http://schemas.microsoft.com/office/powerpoint/2010/main" val="1251037520"/>
+      </p:ext>
+    </p:extLst>
+  </p:cSld>
+  <p:clrMapOvr>
+    <a:masterClrMapping/>
+  </p:clrMapOvr>
+</p:sld>
+</file>
+
+<file path=ppt/slides/slide8.xml><?xml version="1.0" encoding="utf-8"?>
+<p:sld xmlns:a="http://schemas.openxmlformats.org/drawingml/2006/main" xmlns:r="http://schemas.openxmlformats.org/officeDocument/2006/relationships" xmlns:p="http://schemas.openxmlformats.org/presentationml/2006/main">
+  <p:cSld>
+    <p:spTree>
+      <p:nvGrpSpPr>
+        <p:cNvPr id="1" name=""/>
+        <p:cNvGrpSpPr/>
+        <p:nvPr/>
+      </p:nvGrpSpPr>
+      <p:grpSpPr>
+        <a:xfrm>
+          <a:off x="0" y="0"/>
+          <a:ext cx="0" cy="0"/>
+          <a:chOff x="0" y="0"/>
+          <a:chExt cx="0" cy="0"/>
+        </a:xfrm>
+      </p:grpSpPr>
+      <p:pic>
+        <p:nvPicPr>
+          <p:cNvPr id="3" name="Picture 2">
+            <a:extLst>
+              <a:ext uri="{FF2B5EF4-FFF2-40B4-BE49-F238E27FC236}">
+                <a16:creationId xmlns:a16="http://schemas.microsoft.com/office/drawing/2014/main" id="{53337D2F-832F-A885-25AB-E8744EC228D7}"/>
+              </a:ext>
+            </a:extLst>
+          </p:cNvPr>
+          <p:cNvPicPr>
+            <a:picLocks noChangeAspect="1"/>
+          </p:cNvPicPr>
+          <p:nvPr/>
+        </p:nvPicPr>
+        <p:blipFill>
+          <a:blip r:embed="rId2"/>
+          <a:stretch>
+            <a:fillRect/>
+          </a:stretch>
+        </p:blipFill>
+        <p:spPr>
+          <a:xfrm>
+            <a:off x="0" y="163848"/>
+            <a:ext cx="9144000" cy="4815804"/>
+          </a:xfrm>
+          <a:prstGeom prst="rect">
+            <a:avLst/>
+          </a:prstGeom>
+        </p:spPr>
+      </p:pic>
+    </p:spTree>
+    <p:extLst>
+      <p:ext uri="{BB962C8B-B14F-4D97-AF65-F5344CB8AC3E}">
+        <p14:creationId xmlns:p14="http://schemas.microsoft.com/office/powerpoint/2010/main" val="3080740992"/>
+      </p:ext>
+    </p:extLst>
+  </p:cSld>
+  <p:clrMapOvr>
+    <a:masterClrMapping/>
+  </p:clrMapOvr>
+</p:sld>
+</file>
+
+<file path=ppt/slides/slide9.xml><?xml version="1.0" encoding="utf-8"?>
+<p:sld xmlns:a="http://schemas.openxmlformats.org/drawingml/2006/main" xmlns:r="http://schemas.openxmlformats.org/officeDocument/2006/relationships" xmlns:p="http://schemas.openxmlformats.org/presentationml/2006/main">
+  <p:cSld>
+    <p:spTree>
+      <p:nvGrpSpPr>
+        <p:cNvPr id="1" name="">
+          <a:extLst>
+            <a:ext uri="{FF2B5EF4-FFF2-40B4-BE49-F238E27FC236}">
+              <a16:creationId xmlns:a16="http://schemas.microsoft.com/office/drawing/2014/main" id="{E50C5BE0-DDDB-0558-0F77-B8666183D769}"/>
+            </a:ext>
+          </a:extLst>
+        </p:cNvPr>
+        <p:cNvGrpSpPr/>
+        <p:nvPr/>
+      </p:nvGrpSpPr>
+      <p:grpSpPr>
+        <a:xfrm>
+          <a:off x="0" y="0"/>
+          <a:ext cx="0" cy="0"/>
+          <a:chOff x="0" y="0"/>
+          <a:chExt cx="0" cy="0"/>
+        </a:xfrm>
+      </p:grpSpPr>
+      <p:pic>
+        <p:nvPicPr>
+          <p:cNvPr id="4" name="Picture 3">
+            <a:extLst>
+              <a:ext uri="{FF2B5EF4-FFF2-40B4-BE49-F238E27FC236}">
+                <a16:creationId xmlns:a16="http://schemas.microsoft.com/office/drawing/2014/main" id="{3F485BDD-A16B-9ECC-793A-E2750E21C5D1}"/>
+              </a:ext>
+            </a:extLst>
+          </p:cNvPr>
+          <p:cNvPicPr>
+            <a:picLocks noChangeAspect="1"/>
+          </p:cNvPicPr>
+          <p:nvPr/>
+        </p:nvPicPr>
+        <p:blipFill>
+          <a:blip r:embed="rId2"/>
+          <a:stretch>
+            <a:fillRect/>
+          </a:stretch>
+        </p:blipFill>
+        <p:spPr>
+          <a:xfrm>
+            <a:off x="3004941" y="788276"/>
+            <a:ext cx="2274207" cy="4029895"/>
+          </a:xfrm>
+          <a:prstGeom prst="rect">
+            <a:avLst/>
+          </a:prstGeom>
+        </p:spPr>
+      </p:pic>
+    </p:spTree>
+    <p:extLst>
+      <p:ext uri="{BB962C8B-B14F-4D97-AF65-F5344CB8AC3E}">
+        <p14:creationId xmlns:p14="http://schemas.microsoft.com/office/powerpoint/2010/main" val="2552782714"/>
+      </p:ext>
+    </p:extLst>
   </p:cSld>
   <p:clrMapOvr>
     <a:masterClrMapping/>
